--- a/산출물/통합반/이론_오프라인/01회차/통합반_오프라인_01회차.pptx
+++ b/산출물/통합반/이론_오프라인/01회차/통합반_오프라인_01회차.pptx
@@ -1055,7 +1055,7 @@
           </a:p>
           <a:p>
             <a:r>
-              <a:t>[다음] 지나온 길: 아홉 기능 계층과 세 보안 영역</a:t>
+              <a:t>[다음] 지나온 길</a:t>
             </a:r>
           </a:p>
         </p:txBody>
@@ -1840,7 +1840,7 @@
           </a:p>
           <a:p>
             <a:r>
-              <a:t>[다음] 온톨로지: 공통 의미를 정의하는 지식 모델</a:t>
+              <a:t>[다음] 온톨로지</a:t>
             </a:r>
           </a:p>
         </p:txBody>
@@ -2045,7 +2045,7 @@
           </a:p>
           <a:p>
             <a:r>
-              <a:t>[다음] HYD 지식 그래프 지도: 설비 쪽과 진단 · 조치 쪽</a:t>
+              <a:t>[다음] HYD 지식 그래프 지도</a:t>
             </a:r>
           </a:p>
         </p:txBody>
@@ -2525,7 +2525,7 @@
           </a:p>
           <a:p>
             <a:r>
-              <a:t>[다음] MATCH · RETURN: 패턴과 결과의 행</a:t>
+              <a:t>[다음] MATCH · RETURN</a:t>
             </a:r>
           </a:p>
         </p:txBody>
@@ -3010,7 +3010,7 @@
           </a:p>
           <a:p>
             <a:r>
-              <a:t>[다음] 이번 과정의 길: 관계 모델에서 업무 흐름까지</a:t>
+              <a:t>[다음] 이번 과정의 길</a:t>
             </a:r>
           </a:p>
         </p:txBody>
@@ -7407,7 +7407,7 @@
       </p:sp>
       <p:pic>
         <p:nvPicPr>
-          <p:cNvPr id="6" name="삽화:데이터_명령_두경로.svg" descr="illust_7830584678113890120_1793113376.png"/>
+          <p:cNvPr id="6" name="삽화:데이터_명령_두경로.svg" descr="illust_782598252622262410_1793113376.png"/>
           <p:cNvPicPr>
             <a:picLocks noChangeAspect="1"/>
           </p:cNvPicPr>
@@ -12825,7 +12825,7 @@
       </p:sp>
       <p:pic>
         <p:nvPicPr>
-          <p:cNvPr id="6" name="삽화:계층_0_전체.svg" descr="illust_7768230953709888272_1793113376.png"/>
+          <p:cNvPr id="6" name="삽화:계층_0_전체.svg" descr="illust_2809898936783627628_1793113376.png"/>
           <p:cNvPicPr>
             <a:picLocks noChangeAspect="1"/>
           </p:cNvPicPr>
@@ -17913,7 +17913,7 @@
       </p:sp>
       <p:pic>
         <p:nvPicPr>
-          <p:cNvPr id="6" name="삽화:흩어진정보.svg" descr="illust_6962456000953375408_1793113376.png"/>
+          <p:cNvPr id="6" name="삽화:흩어진정보.svg" descr="illust_8128912894914398615_1793113376.png"/>
           <p:cNvPicPr>
             <a:picLocks noChangeAspect="1"/>
           </p:cNvPicPr>
@@ -20317,7 +20317,7 @@
       </p:sp>
       <p:pic>
         <p:nvPicPr>
-          <p:cNvPr id="6" name="Picture 5" descr="illust_694396178885700467_1793113376.png"/>
+          <p:cNvPr id="6" name="Picture 5" descr="illust_1699370336140675324_1793113376.png"/>
           <p:cNvPicPr>
             <a:picLocks noChangeAspect="1"/>
           </p:cNvPicPr>
@@ -20933,7 +20933,7 @@
       </p:sp>
       <p:pic>
         <p:nvPicPr>
-          <p:cNvPr id="6" name="삽화:지식그래프_지도.svg" descr="illust_7779049541675698428_1793113376.png"/>
+          <p:cNvPr id="6" name="삽화:지식그래프_지도.svg" descr="illust_2807940039841128142_1793113376.png"/>
           <p:cNvPicPr>
             <a:picLocks noChangeAspect="1"/>
           </p:cNvPicPr>
@@ -22337,7 +22337,7 @@
       </p:sp>
       <p:pic>
         <p:nvPicPr>
-          <p:cNvPr id="6" name="삽화:속성그래프_대각.svg" descr="illust_1139549447506187048_1793113376.png"/>
+          <p:cNvPr id="6" name="삽화:속성그래프_대각.svg" descr="illust_6912833242524673372_1793113376.png"/>
           <p:cNvPicPr>
             <a:picLocks noChangeAspect="1"/>
           </p:cNvPicPr>
@@ -23541,7 +23541,7 @@
       </p:sp>
       <p:pic>
         <p:nvPicPr>
-          <p:cNvPr id="6" name="삽화:표기_그래프.svg" descr="illust_638189347643792255_1793113376.png"/>
+          <p:cNvPr id="6" name="삽화:표기_그래프.svg" descr="illust_1483636615377730797_1793113376.png"/>
           <p:cNvPicPr>
             <a:picLocks noChangeAspect="1"/>
           </p:cNvPicPr>
@@ -30096,8 +30096,8 @@
         </p:nvSpPr>
         <p:spPr>
           <a:xfrm>
-            <a:off x="8138160" y="5449824"/>
-            <a:ext cx="347472" cy="347472"/>
+            <a:off x="548640" y="1408176"/>
+            <a:ext cx="11094415" cy="18288"/>
           </a:xfrm>
           <a:prstGeom prst="rect">
             <a:avLst/>
@@ -30193,7 +30193,7 @@
         </p:nvSpPr>
         <p:spPr>
           <a:xfrm>
-            <a:off x="8138160" y="5449824"/>
+            <a:off x="8138160" y="1682496"/>
             <a:ext cx="347472" cy="347472"/>
           </a:xfrm>
           <a:prstGeom prst="ellipse">
@@ -30345,7 +30345,7 @@
         </p:nvSpPr>
         <p:spPr>
           <a:xfrm>
-            <a:off x="8138160" y="5449824"/>
+            <a:off x="8138160" y="2852928"/>
             <a:ext cx="347472" cy="347472"/>
           </a:xfrm>
           <a:prstGeom prst="ellipse">
@@ -30476,7 +30476,7 @@
         </p:nvSpPr>
         <p:spPr>
           <a:xfrm>
-            <a:off x="8138160" y="5449824"/>
+            <a:off x="8138160" y="4023359"/>
             <a:ext cx="347472" cy="347472"/>
           </a:xfrm>
           <a:prstGeom prst="ellipse">
@@ -30607,7 +30607,7 @@
         </p:nvSpPr>
         <p:spPr>
           <a:xfrm>
-            <a:off x="8138160" y="5449824"/>
+            <a:off x="8138160" y="5193792"/>
             <a:ext cx="347472" cy="347472"/>
           </a:xfrm>
           <a:prstGeom prst="ellipse">
@@ -32866,7 +32866,7 @@
       </p:sp>
       <p:pic>
         <p:nvPicPr>
-          <p:cNvPr id="6" name="삽화:설비_유압파워팩.svg" descr="illust_3596342954630996514_1793113376.png"/>
+          <p:cNvPr id="6" name="삽화:설비_유압파워팩.svg" descr="illust_3141729247201165051_1793113376.png"/>
           <p:cNvPicPr>
             <a:picLocks noChangeAspect="1"/>
           </p:cNvPicPr>

--- a/산출물/통합반/이론_오프라인/01회차/통합반_오프라인_01회차.pptx
+++ b/산출물/통합반/이론_오프라인/01회차/통합반_오프라인_01회차.pptx
@@ -550,11 +550,6 @@
           </a:p>
           <a:p>
             <a:r>
-              <a:t>· 이론은 온라인 1회차와 같은 교재의 장에서 오늘 실습에 필요한 핵심만 골라 잇는다</a:t>
-            </a:r>
-          </a:p>
-          <a:p>
-            <a:r>
               <a:t>· 줄기: 완성 흐름 → 시스템 구조 → 지식이 필요한 이유 → 그래프로 다루는 말 → 포털과 과정의 길</a:t>
             </a:r>
           </a:p>
@@ -1145,7 +1140,7 @@
           </a:p>
           <a:p>
             <a:r>
-              <a:t>· 이 단원 끝에서 관계를 문장으로 읽는 법 → 관계도 실습으로 이어진다</a:t>
+              <a:t>· 이 단원 끝에서 관계를 문장으로 읽는 법까지</a:t>
             </a:r>
           </a:p>
           <a:p>
@@ -1640,12 +1635,12 @@
           </a:p>
           <a:p>
             <a:r>
-              <a:t>· 3 지식과 관계: 경보 값만으로 원인을 못 가린다 → 관계로 적은 지식, 그 관계를 그래프와 Cypher로 다룬다(이어지는 실습)</a:t>
-            </a:r>
-          </a:p>
-          <a:p>
-            <a:r>
-              <a:t>· 4 포털과 과정의 길: 시연에서 열 네 화면, 그리고 과정 전체가 어디로 가는지</a:t>
+              <a:t>· 3 지식과 관계: 경보 값만으로 원인을 못 가린다 → 관계로 적은 지식, 그 관계를 그래프와 Cypher로 다룬다</a:t>
+            </a:r>
+          </a:p>
+          <a:p>
+            <a:r>
+              <a:t>· 4 포털과 과정의 길: 포털 네 화면이 각각 답하는 물음, 그리고 과정 전체가 어디로 가는지</a:t>
             </a:r>
           </a:p>
           <a:p>
@@ -2140,7 +2135,7 @@
           </a:p>
           <a:p>
             <a:r>
-              <a:t>· 실습에서는 별도 Neo4j 랩 DB에서 직접 만들고 찾고 고치고 지운다 → 여기서는 읽는 법만</a:t>
+              <a:t>· 클래스 = 공통 특성을 가진 대상의 유형, 인스턴스 = 그 유형에 속하는 실제 개별 대상 — 앞 단원 온톨로지의 「종류」(센서 · 증상 · 원인)가 클래스, 유온 센서 하나가 센서 클래스의 인스턴스</a:t>
             </a:r>
           </a:p>
           <a:p>
@@ -2235,7 +2230,7 @@
           </a:p>
           <a:p>
             <a:r>
-              <a:t>· 설계 말과 대응: 대상 하나(인스턴스) → 노드, 대상의 종류(클래스) → 레이블, 관계 · 속성은 그대로. 공급 조건 같은 관계의 속성은 관계 쪽에 저장</a:t>
+              <a:t>· 설계 말과 대응: 대상 하나(인스턴스) → 노드, 대상의 종류(클래스) → 레이블, 관계 · 속성은 그대로</a:t>
             </a:r>
           </a:p>
           <a:p>
@@ -2610,7 +2605,7 @@
           </a:p>
           <a:p>
             <a:r>
-              <a:t>· 포털 시연에서 무엇을 어디서 볼지 미리 정해 둔다</a:t>
+              <a:t>· 포털의 각 화면이 어떤 물음에 답하는지 가른다</a:t>
             </a:r>
           </a:p>
           <a:p>
@@ -2710,12 +2705,12 @@
           </a:p>
           <a:p>
             <a:r>
-              <a:t>· 04 관계를 저장하고 찾는 말(노드 · 레이블 · Cypher) — Cypher 실습의 바탕</a:t>
-            </a:r>
-          </a:p>
-          <a:p>
-            <a:r>
-              <a:t>· 05 시연에서 열 포털 화면과 과정 전체의 길, 오늘 실습</a:t>
+              <a:t>· 04 관계를 저장하고 찾는 말(노드 · 레이블 · Cypher)</a:t>
+            </a:r>
+          </a:p>
+          <a:p>
+            <a:r>
+              <a:t>· 05 포털 네 화면의 역할과 과정 전체의 길</a:t>
             </a:r>
           </a:p>
           <a:p>
@@ -2815,7 +2810,7 @@
           </a:p>
           <a:p>
             <a:r>
-              <a:t>· 시연 순서: 경보는 설비 화면 → 추천과 근거는 에이전트 · 지식 지도 → 승인은 작업함 → 결과는 다시 설비 화면</a:t>
+              <a:t>· 사건 한 건이 지나는 순서: 경보는 설비 화면 → 추천과 근거는 에이전트 · 지식 지도 → 승인은 작업함 → 결과는 다시 설비 화면</a:t>
             </a:r>
           </a:p>
           <a:p>
@@ -3115,6 +3110,11 @@
           </a:p>
           <a:p>
             <a:r>
+              <a:t>· 이 기록들도 그래프에서는 노드와 관계: 경보 · 추천안 · 승인 · 명령을 관계로 이어 두면 「이 승인은 어떤 증거에서 나왔나」를 MATCH 패턴으로 찾고 RETURN의 행으로 읽는다</a:t>
+            </a:r>
+          </a:p>
+          <a:p>
+            <a:r>
               <a:t>[다음] 오늘 다룬 핵심 개념과 주요 용어 정리</a:t>
             </a:r>
           </a:p>
@@ -3185,7 +3185,7 @@
           <a:lstStyle/>
           <a:p>
             <a:r>
-              <a:t>[짚을 곳] 표 여덟 줄을 위에서부터, 정식 명칭은 화면에 맡기고 뜻만</a:t>
+              <a:t>[짚을 곳] 표 아홉 줄을 위에서부터, 정식 명칭은 화면에 맡기고 뜻만</a:t>
             </a:r>
           </a:p>
           <a:p>
@@ -3201,6 +3201,11 @@
           <a:p>
             <a:r>
               <a:t>· HITL = 자동 처리 중간에 사람이 승인 · 거절로 결정, MES = 생산 지시 · 실적 · 납기를 관리</a:t>
+            </a:r>
+          </a:p>
+          <a:p>
+            <a:r>
+              <a:t>· 클래스 = 공통 특성을 가진 대상의 유형, 인스턴스 = 그 유형에 속하는 실제 개별 대상</a:t>
             </a:r>
           </a:p>
           <a:p>
@@ -3770,6 +3775,11 @@
           </a:p>
           <a:p>
             <a:r>
+              <a:t>· HYD = 유압 설비와 업무 시스템을 연결한 수업용 시스템 — 그 위에서 쿨러 사건 한 건이 끝까지 돈다</a:t>
+            </a:r>
+          </a:p>
+          <a:p>
+            <a:r>
               <a:t>· 부분부터 배우면 왜 필요한지 놓친다 → 완성된 흐름을 먼저</a:t>
             </a:r>
           </a:p>
@@ -3855,7 +3865,7 @@
           </a:p>
           <a:p>
             <a:r>
-              <a:t>· 교재에 보관한 사건 기록이다. 단계는 실습과 비교하되 시각 · 수치는 이 기록 값으로 읽는다</a:t>
+              <a:t>· 교재에 보관한 사건 기록이다. 시각 · 수치는 이 기록 값으로 읽는다</a:t>
             </a:r>
           </a:p>
           <a:p>
@@ -3960,7 +3970,7 @@
           </a:p>
           <a:p>
             <a:r>
-              <a:t>· 끝에서 한 장으로 다시 묶는다(아홉 기능 계층과 세 보안 영역)</a:t>
+              <a:t>· 여기서는 두 경로와 위 세 계층(7~9)을 짚고, 단원 끝에서 아홉 기능 계층과 세 보안 영역의 전체 지도로 묶는다</a:t>
             </a:r>
           </a:p>
           <a:p>
@@ -12300,7 +12310,7 @@
       </p:sp>
       <p:pic>
         <p:nvPicPr>
-          <p:cNvPr id="6" name="삽화:계층_0_전체.svg" descr="illust_27094810319428792_1793113376.png"/>
+          <p:cNvPr id="6" name="삽화:계층_0_전체.svg" descr="illust_1794475205685819174_1793113376.png"/>
           <p:cNvPicPr>
             <a:picLocks noChangeAspect="1"/>
           </p:cNvPicPr>
@@ -16256,7 +16266,7 @@
       </p:sp>
       <p:pic>
         <p:nvPicPr>
-          <p:cNvPr id="6" name="삽화:흩어진정보.svg" descr="illust_2409744751446362939_1793113376.png"/>
+          <p:cNvPr id="6" name="삽화:흩어진정보.svg" descr="illust_8184707874810879031_1793113376.png"/>
           <p:cNvPicPr>
             <a:picLocks noChangeAspect="1"/>
           </p:cNvPicPr>
@@ -19792,7 +19802,7 @@
       </p:sp>
       <p:pic>
         <p:nvPicPr>
-          <p:cNvPr id="6" name="Picture 5" descr="illust_5350511146489071612_1793113376.png"/>
+          <p:cNvPr id="6" name="Picture 5" descr="illust_2942458411435779529_1793113376.png"/>
           <p:cNvPicPr>
             <a:picLocks noChangeAspect="1"/>
           </p:cNvPicPr>
@@ -20408,7 +20418,7 @@
       </p:sp>
       <p:pic>
         <p:nvPicPr>
-          <p:cNvPr id="6" name="삽화:지식그래프_지도.svg" descr="illust_8541665148589377334_1793113376.png"/>
+          <p:cNvPr id="6" name="삽화:지식그래프_지도.svg" descr="illust_2439761754932226608_1793113376.png"/>
           <p:cNvPicPr>
             <a:picLocks noChangeAspect="1"/>
           </p:cNvPicPr>
@@ -21812,7 +21822,7 @@
       </p:sp>
       <p:pic>
         <p:nvPicPr>
-          <p:cNvPr id="6" name="삽화:속성그래프_대각.svg" descr="illust_3896485124009766529_1793113376.png"/>
+          <p:cNvPr id="6" name="삽화:속성그래프_대각.svg" descr="illust_117479139216104439_1793113376.png"/>
           <p:cNvPicPr>
             <a:picLocks noChangeAspect="1"/>
           </p:cNvPicPr>
@@ -23016,7 +23026,7 @@
       </p:sp>
       <p:pic>
         <p:nvPicPr>
-          <p:cNvPr id="6" name="삽화:표기_그래프.svg" descr="illust_4535208847893865406_1793113376.png"/>
+          <p:cNvPr id="6" name="삽화:표기_그래프.svg" descr="illust_6778996340917412003_1793113376.png"/>
           <p:cNvPicPr>
             <a:picLocks noChangeAspect="1"/>
           </p:cNvPicPr>
@@ -24375,7 +24385,7 @@
                 <a:ea typeface="맑은 고딕"/>
                 <a:cs typeface="맑은 고딕"/>
               </a:rPr>
-              <a:t>시연에서 열 네 화면과, 관계 모델에서 업무 흐름까지 가는 길</a:t>
+              <a:t>포털 네 화면의 역할과, 관계 모델에서 업무 흐름까지 가는 과정 전체의 길</a:t>
             </a:r>
           </a:p>
         </p:txBody>
@@ -29326,7 +29336,7 @@
         </p:nvSpPr>
         <p:spPr>
           <a:xfrm>
-            <a:off x="548640" y="1627632"/>
+            <a:off x="548640" y="1627631"/>
             <a:ext cx="11094415" cy="347472"/>
           </a:xfrm>
           <a:prstGeom prst="roundRect">
@@ -29357,7 +29367,7 @@
         </p:nvSpPr>
         <p:spPr>
           <a:xfrm>
-            <a:off x="685800" y="1627632"/>
+            <a:off x="685800" y="1627631"/>
             <a:ext cx="2514600" cy="347472"/>
           </a:xfrm>
           <a:prstGeom prst="rect">
@@ -29396,7 +29406,7 @@
         </p:nvSpPr>
         <p:spPr>
           <a:xfrm>
-            <a:off x="3200400" y="1627632"/>
+            <a:off x="3200400" y="1627631"/>
             <a:ext cx="8442655" cy="347472"/>
           </a:xfrm>
           <a:prstGeom prst="rect">
@@ -29436,7 +29446,7 @@
         <p:spPr>
           <a:xfrm>
             <a:off x="548640" y="2061972"/>
-            <a:ext cx="11094415" cy="476631"/>
+            <a:ext cx="11094415" cy="416560"/>
           </a:xfrm>
           <a:prstGeom prst="roundRect">
             <a:avLst>
@@ -29466,8 +29476,8 @@
         </p:nvSpPr>
         <p:spPr>
           <a:xfrm>
-            <a:off x="685800" y="2029968"/>
-            <a:ext cx="2514600" cy="540639"/>
+            <a:off x="685800" y="2029967"/>
+            <a:ext cx="2514600" cy="480568"/>
           </a:xfrm>
           <a:prstGeom prst="rect">
             <a:avLst/>
@@ -29505,8 +29515,8 @@
         </p:nvSpPr>
         <p:spPr>
           <a:xfrm>
-            <a:off x="3200400" y="2029968"/>
-            <a:ext cx="8351215" cy="540639"/>
+            <a:off x="3200400" y="2029967"/>
+            <a:ext cx="8351215" cy="480568"/>
           </a:xfrm>
           <a:prstGeom prst="rect">
             <a:avLst/>
@@ -29523,7 +29533,7 @@
               </a:lnSpc>
             </a:pPr>
             <a:r>
-              <a:rPr sz="1400" b="0">
+              <a:rPr sz="1250" b="0">
                 <a:solidFill>
                   <a:srgbClr val="1F2A3A"/>
                 </a:solidFill>
@@ -29541,7 +29551,7 @@
               </a:lnSpc>
             </a:pPr>
             <a:r>
-              <a:rPr sz="1400" b="0">
+              <a:rPr sz="1250" b="0">
                 <a:solidFill>
                   <a:srgbClr val="1F2A3A"/>
                 </a:solidFill>
@@ -29562,8 +29572,8 @@
         </p:nvSpPr>
         <p:spPr>
           <a:xfrm>
-            <a:off x="548640" y="2602611"/>
-            <a:ext cx="11094415" cy="476631"/>
+            <a:off x="548640" y="2542540"/>
+            <a:ext cx="11094415" cy="416560"/>
           </a:xfrm>
           <a:prstGeom prst="roundRect">
             <a:avLst>
@@ -29593,8 +29603,8 @@
         </p:nvSpPr>
         <p:spPr>
           <a:xfrm>
-            <a:off x="685800" y="2570607"/>
-            <a:ext cx="2514600" cy="540639"/>
+            <a:off x="685800" y="2510536"/>
+            <a:ext cx="2514600" cy="480568"/>
           </a:xfrm>
           <a:prstGeom prst="rect">
             <a:avLst/>
@@ -29632,8 +29642,8 @@
         </p:nvSpPr>
         <p:spPr>
           <a:xfrm>
-            <a:off x="3200400" y="2570607"/>
-            <a:ext cx="8351215" cy="540639"/>
+            <a:off x="3200400" y="2510536"/>
+            <a:ext cx="8351215" cy="480568"/>
           </a:xfrm>
           <a:prstGeom prst="rect">
             <a:avLst/>
@@ -29650,7 +29660,7 @@
               </a:lnSpc>
             </a:pPr>
             <a:r>
-              <a:rPr sz="1400" b="0">
+              <a:rPr sz="1250" b="0">
                 <a:solidFill>
                   <a:srgbClr val="1F2A3A"/>
                 </a:solidFill>
@@ -29668,7 +29678,7 @@
               </a:lnSpc>
             </a:pPr>
             <a:r>
-              <a:rPr sz="1400" b="0">
+              <a:rPr sz="1250" b="0">
                 <a:solidFill>
                   <a:srgbClr val="1F2A3A"/>
                 </a:solidFill>
@@ -29689,8 +29699,8 @@
         </p:nvSpPr>
         <p:spPr>
           <a:xfrm>
-            <a:off x="548640" y="3143250"/>
-            <a:ext cx="11094415" cy="476631"/>
+            <a:off x="548640" y="3023108"/>
+            <a:ext cx="11094415" cy="416560"/>
           </a:xfrm>
           <a:prstGeom prst="roundRect">
             <a:avLst>
@@ -29720,8 +29730,8 @@
         </p:nvSpPr>
         <p:spPr>
           <a:xfrm>
-            <a:off x="685800" y="3111246"/>
-            <a:ext cx="2514600" cy="540639"/>
+            <a:off x="685800" y="2991104"/>
+            <a:ext cx="2514600" cy="480568"/>
           </a:xfrm>
           <a:prstGeom prst="rect">
             <a:avLst/>
@@ -29759,8 +29769,8 @@
         </p:nvSpPr>
         <p:spPr>
           <a:xfrm>
-            <a:off x="3200400" y="3111246"/>
-            <a:ext cx="8351215" cy="540639"/>
+            <a:off x="3200400" y="2991104"/>
+            <a:ext cx="8351215" cy="480568"/>
           </a:xfrm>
           <a:prstGeom prst="rect">
             <a:avLst/>
@@ -29777,7 +29787,7 @@
               </a:lnSpc>
             </a:pPr>
             <a:r>
-              <a:rPr sz="1400" b="0">
+              <a:rPr sz="1250" b="0">
                 <a:solidFill>
                   <a:srgbClr val="1F2A3A"/>
                 </a:solidFill>
@@ -29795,7 +29805,7 @@
               </a:lnSpc>
             </a:pPr>
             <a:r>
-              <a:rPr sz="1400" b="0">
+              <a:rPr sz="1250" b="0">
                 <a:solidFill>
                   <a:srgbClr val="1F2A3A"/>
                 </a:solidFill>
@@ -29816,8 +29826,8 @@
         </p:nvSpPr>
         <p:spPr>
           <a:xfrm>
-            <a:off x="548640" y="3683888"/>
-            <a:ext cx="11094415" cy="476631"/>
+            <a:off x="548640" y="3503676"/>
+            <a:ext cx="11094415" cy="416560"/>
           </a:xfrm>
           <a:prstGeom prst="roundRect">
             <a:avLst>
@@ -29847,8 +29857,8 @@
         </p:nvSpPr>
         <p:spPr>
           <a:xfrm>
-            <a:off x="685800" y="3651885"/>
-            <a:ext cx="2514600" cy="540639"/>
+            <a:off x="685800" y="3471672"/>
+            <a:ext cx="2514600" cy="480568"/>
           </a:xfrm>
           <a:prstGeom prst="rect">
             <a:avLst/>
@@ -29886,8 +29896,8 @@
         </p:nvSpPr>
         <p:spPr>
           <a:xfrm>
-            <a:off x="3200400" y="3651885"/>
-            <a:ext cx="8351215" cy="540639"/>
+            <a:off x="3200400" y="3471672"/>
+            <a:ext cx="8351215" cy="480568"/>
           </a:xfrm>
           <a:prstGeom prst="rect">
             <a:avLst/>
@@ -29904,7 +29914,7 @@
               </a:lnSpc>
             </a:pPr>
             <a:r>
-              <a:rPr sz="1400" b="0">
+              <a:rPr sz="1250" b="0">
                 <a:solidFill>
                   <a:srgbClr val="1F2A3A"/>
                 </a:solidFill>
@@ -29922,7 +29932,7 @@
               </a:lnSpc>
             </a:pPr>
             <a:r>
-              <a:rPr sz="1400" b="0">
+              <a:rPr sz="1250" b="0">
                 <a:solidFill>
                   <a:srgbClr val="1F2A3A"/>
                 </a:solidFill>
@@ -29943,8 +29953,8 @@
         </p:nvSpPr>
         <p:spPr>
           <a:xfrm>
-            <a:off x="548640" y="4224528"/>
-            <a:ext cx="11094415" cy="476631"/>
+            <a:off x="548640" y="3984244"/>
+            <a:ext cx="11094415" cy="416560"/>
           </a:xfrm>
           <a:prstGeom prst="roundRect">
             <a:avLst>
@@ -29974,8 +29984,8 @@
         </p:nvSpPr>
         <p:spPr>
           <a:xfrm>
-            <a:off x="685800" y="4192524"/>
-            <a:ext cx="2514600" cy="540639"/>
+            <a:off x="685800" y="3952239"/>
+            <a:ext cx="2514600" cy="480568"/>
           </a:xfrm>
           <a:prstGeom prst="rect">
             <a:avLst/>
@@ -30013,8 +30023,8 @@
         </p:nvSpPr>
         <p:spPr>
           <a:xfrm>
-            <a:off x="3200400" y="4192524"/>
-            <a:ext cx="8351215" cy="540639"/>
+            <a:off x="3200400" y="3952239"/>
+            <a:ext cx="8351215" cy="480568"/>
           </a:xfrm>
           <a:prstGeom prst="rect">
             <a:avLst/>
@@ -30031,7 +30041,7 @@
               </a:lnSpc>
             </a:pPr>
             <a:r>
-              <a:rPr sz="1400" b="0">
+              <a:rPr sz="1250" b="0">
                 <a:solidFill>
                   <a:srgbClr val="1F2A3A"/>
                 </a:solidFill>
@@ -30049,7 +30059,7 @@
               </a:lnSpc>
             </a:pPr>
             <a:r>
-              <a:rPr sz="1400" b="0">
+              <a:rPr sz="1250" b="0">
                 <a:solidFill>
                   <a:srgbClr val="1F2A3A"/>
                 </a:solidFill>
@@ -30070,8 +30080,8 @@
         </p:nvSpPr>
         <p:spPr>
           <a:xfrm>
-            <a:off x="548640" y="4765167"/>
-            <a:ext cx="11094415" cy="476631"/>
+            <a:off x="548640" y="4464811"/>
+            <a:ext cx="11094415" cy="416560"/>
           </a:xfrm>
           <a:prstGeom prst="roundRect">
             <a:avLst>
@@ -30101,8 +30111,8 @@
         </p:nvSpPr>
         <p:spPr>
           <a:xfrm>
-            <a:off x="685800" y="4733163"/>
-            <a:ext cx="2514600" cy="540639"/>
+            <a:off x="685800" y="4432807"/>
+            <a:ext cx="2514600" cy="480568"/>
           </a:xfrm>
           <a:prstGeom prst="rect">
             <a:avLst/>
@@ -30140,8 +30150,8 @@
         </p:nvSpPr>
         <p:spPr>
           <a:xfrm>
-            <a:off x="3200400" y="4733163"/>
-            <a:ext cx="8351215" cy="540639"/>
+            <a:off x="3200400" y="4432807"/>
+            <a:ext cx="8351215" cy="480568"/>
           </a:xfrm>
           <a:prstGeom prst="rect">
             <a:avLst/>
@@ -30158,7 +30168,7 @@
               </a:lnSpc>
             </a:pPr>
             <a:r>
-              <a:rPr sz="1400" b="0">
+              <a:rPr sz="1250" b="0">
                 <a:solidFill>
                   <a:srgbClr val="1F2A3A"/>
                 </a:solidFill>
@@ -30176,7 +30186,7 @@
               </a:lnSpc>
             </a:pPr>
             <a:r>
-              <a:rPr sz="1400" b="0">
+              <a:rPr sz="1250" b="0">
                 <a:solidFill>
                   <a:srgbClr val="1F2A3A"/>
                 </a:solidFill>
@@ -30197,8 +30207,8 @@
         </p:nvSpPr>
         <p:spPr>
           <a:xfrm>
-            <a:off x="548640" y="5305806"/>
-            <a:ext cx="11094415" cy="476631"/>
+            <a:off x="548640" y="4945380"/>
+            <a:ext cx="11094415" cy="416560"/>
           </a:xfrm>
           <a:prstGeom prst="roundRect">
             <a:avLst>
@@ -30228,8 +30238,8 @@
         </p:nvSpPr>
         <p:spPr>
           <a:xfrm>
-            <a:off x="685800" y="5273802"/>
-            <a:ext cx="2514600" cy="540639"/>
+            <a:off x="685800" y="4913376"/>
+            <a:ext cx="2514600" cy="480568"/>
           </a:xfrm>
           <a:prstGeom prst="rect">
             <a:avLst/>
@@ -30254,7 +30264,7 @@
                 <a:ea typeface="맑은 고딕"/>
                 <a:cs typeface="맑은 고딕"/>
               </a:rPr>
-              <a:t>레이블</a:t>
+              <a:t>클래스 · 인스턴스</a:t>
             </a:r>
           </a:p>
         </p:txBody>
@@ -30267,8 +30277,8 @@
         </p:nvSpPr>
         <p:spPr>
           <a:xfrm>
-            <a:off x="3200400" y="5273802"/>
-            <a:ext cx="8351215" cy="540639"/>
+            <a:off x="3200400" y="4913376"/>
+            <a:ext cx="8351215" cy="480568"/>
           </a:xfrm>
           <a:prstGeom prst="rect">
             <a:avLst/>
@@ -30285,7 +30295,7 @@
               </a:lnSpc>
             </a:pPr>
             <a:r>
-              <a:rPr sz="1400" b="0">
+              <a:rPr sz="1250" b="0">
                 <a:solidFill>
                   <a:srgbClr val="1F2A3A"/>
                 </a:solidFill>
@@ -30293,17 +30303,17 @@
                 <a:ea typeface="맑은 고딕"/>
                 <a:cs typeface="맑은 고딕"/>
               </a:rPr>
-              <a:t>Label</a:t>
-            </a:r>
-          </a:p>
-          <a:p>
-            <a:pPr algn="l" eaLnBrk="0">
-              <a:lnSpc>
-                <a:spcPct val="110000"/>
-              </a:lnSpc>
-            </a:pPr>
-            <a:r>
-              <a:rPr sz="1400" b="0">
+              <a:t>Class · Instance</a:t>
+            </a:r>
+          </a:p>
+          <a:p>
+            <a:pPr algn="l" eaLnBrk="0">
+              <a:lnSpc>
+                <a:spcPct val="110000"/>
+              </a:lnSpc>
+            </a:pPr>
+            <a:r>
+              <a:rPr sz="1250" b="0">
                 <a:solidFill>
                   <a:srgbClr val="1F2A3A"/>
                 </a:solidFill>
@@ -30311,7 +30321,7 @@
                 <a:ea typeface="맑은 고딕"/>
                 <a:cs typeface="맑은 고딕"/>
               </a:rPr>
-              <a:t>그래프 DB에서 노드의 종류를 나타내는 이름</a:t>
+              <a:t>공통 특성을 가진 대상의 유형과, 그 유형에 속하는 실제 개별 대상</a:t>
             </a:r>
           </a:p>
         </p:txBody>
@@ -30324,8 +30334,8 @@
         </p:nvSpPr>
         <p:spPr>
           <a:xfrm>
-            <a:off x="548640" y="5846445"/>
-            <a:ext cx="11094415" cy="476631"/>
+            <a:off x="548640" y="5425948"/>
+            <a:ext cx="11094415" cy="416560"/>
           </a:xfrm>
           <a:prstGeom prst="roundRect">
             <a:avLst>
@@ -30355,8 +30365,8 @@
         </p:nvSpPr>
         <p:spPr>
           <a:xfrm>
-            <a:off x="685800" y="5814441"/>
-            <a:ext cx="2514600" cy="540639"/>
+            <a:off x="685800" y="5393944"/>
+            <a:ext cx="2514600" cy="480568"/>
           </a:xfrm>
           <a:prstGeom prst="rect">
             <a:avLst/>
@@ -30381,6 +30391,133 @@
                 <a:ea typeface="맑은 고딕"/>
                 <a:cs typeface="맑은 고딕"/>
               </a:rPr>
+              <a:t>레이블</a:t>
+            </a:r>
+          </a:p>
+        </p:txBody>
+      </p:sp>
+      <p:sp>
+        <p:nvSpPr>
+          <p:cNvPr id="32" name="TextBox 31"/>
+          <p:cNvSpPr txBox="1"/>
+          <p:nvPr/>
+        </p:nvSpPr>
+        <p:spPr>
+          <a:xfrm>
+            <a:off x="3200400" y="5393944"/>
+            <a:ext cx="8351215" cy="480568"/>
+          </a:xfrm>
+          <a:prstGeom prst="rect">
+            <a:avLst/>
+          </a:prstGeom>
+          <a:noFill/>
+        </p:spPr>
+        <p:txBody>
+          <a:bodyPr wrap="square" anchor="ctr"/>
+          <a:lstStyle/>
+          <a:p>
+            <a:pPr algn="l" eaLnBrk="0">
+              <a:lnSpc>
+                <a:spcPct val="110000"/>
+              </a:lnSpc>
+            </a:pPr>
+            <a:r>
+              <a:rPr sz="1250" b="0">
+                <a:solidFill>
+                  <a:srgbClr val="1F2A3A"/>
+                </a:solidFill>
+                <a:latin typeface="맑은 고딕"/>
+                <a:ea typeface="맑은 고딕"/>
+                <a:cs typeface="맑은 고딕"/>
+              </a:rPr>
+              <a:t>Label</a:t>
+            </a:r>
+          </a:p>
+          <a:p>
+            <a:pPr algn="l" eaLnBrk="0">
+              <a:lnSpc>
+                <a:spcPct val="110000"/>
+              </a:lnSpc>
+            </a:pPr>
+            <a:r>
+              <a:rPr sz="1250" b="0">
+                <a:solidFill>
+                  <a:srgbClr val="1F2A3A"/>
+                </a:solidFill>
+                <a:latin typeface="맑은 고딕"/>
+                <a:ea typeface="맑은 고딕"/>
+                <a:cs typeface="맑은 고딕"/>
+              </a:rPr>
+              <a:t>그래프 DB에서 노드의 종류를 나타내는 이름</a:t>
+            </a:r>
+          </a:p>
+        </p:txBody>
+      </p:sp>
+      <p:sp>
+        <p:nvSpPr>
+          <p:cNvPr id="33" name="Rounded Rectangle 32"/>
+          <p:cNvSpPr/>
+          <p:nvPr/>
+        </p:nvSpPr>
+        <p:spPr>
+          <a:xfrm>
+            <a:off x="548640" y="5906516"/>
+            <a:ext cx="11094415" cy="416560"/>
+          </a:xfrm>
+          <a:prstGeom prst="roundRect">
+            <a:avLst>
+              <a:gd name="adj" fmla="val 8000"/>
+            </a:avLst>
+          </a:prstGeom>
+          <a:solidFill>
+            <a:srgbClr val="F3F6F9"/>
+          </a:solidFill>
+          <a:ln>
+            <a:noFill/>
+          </a:ln>
+        </p:spPr>
+        <p:txBody>
+          <a:bodyPr rtlCol="0" anchor="ctr"/>
+          <a:lstStyle/>
+          <a:p>
+            <a:pPr algn="ctr"/>
+          </a:p>
+        </p:txBody>
+      </p:sp>
+      <p:sp>
+        <p:nvSpPr>
+          <p:cNvPr id="34" name="TextBox 33"/>
+          <p:cNvSpPr txBox="1"/>
+          <p:nvPr/>
+        </p:nvSpPr>
+        <p:spPr>
+          <a:xfrm>
+            <a:off x="685800" y="5874512"/>
+            <a:ext cx="2514600" cy="480568"/>
+          </a:xfrm>
+          <a:prstGeom prst="rect">
+            <a:avLst/>
+          </a:prstGeom>
+          <a:noFill/>
+        </p:spPr>
+        <p:txBody>
+          <a:bodyPr wrap="square" anchor="ctr"/>
+          <a:lstStyle/>
+          <a:p>
+            <a:pPr algn="l" eaLnBrk="0">
+              <a:lnSpc>
+                <a:spcPct val="110000"/>
+              </a:lnSpc>
+            </a:pPr>
+            <a:r>
+              <a:rPr sz="1450" b="1">
+                <a:solidFill>
+                  <a:srgbClr val="13294B"/>
+                </a:solidFill>
+                <a:latin typeface="맑은 고딕"/>
+                <a:ea typeface="맑은 고딕"/>
+                <a:cs typeface="맑은 고딕"/>
+              </a:rPr>
               <a:t>Cypher 쿼리</a:t>
             </a:r>
           </a:p>
@@ -30388,14 +30525,14 @@
       </p:sp>
       <p:sp>
         <p:nvSpPr>
-          <p:cNvPr id="32" name="TextBox 31"/>
-          <p:cNvSpPr txBox="1"/>
-          <p:nvPr/>
-        </p:nvSpPr>
-        <p:spPr>
-          <a:xfrm>
-            <a:off x="3200400" y="5814441"/>
-            <a:ext cx="8351215" cy="540639"/>
+          <p:cNvPr id="35" name="TextBox 34"/>
+          <p:cNvSpPr txBox="1"/>
+          <p:nvPr/>
+        </p:nvSpPr>
+        <p:spPr>
+          <a:xfrm>
+            <a:off x="3200400" y="5874512"/>
+            <a:ext cx="8351215" cy="480568"/>
           </a:xfrm>
           <a:prstGeom prst="rect">
             <a:avLst/>
@@ -30412,7 +30549,7 @@
               </a:lnSpc>
             </a:pPr>
             <a:r>
-              <a:rPr sz="1400" b="0">
+              <a:rPr sz="1250" b="0">
                 <a:solidFill>
                   <a:srgbClr val="1F2A3A"/>
                 </a:solidFill>
@@ -30430,7 +30567,7 @@
               </a:lnSpc>
             </a:pPr>
             <a:r>
-              <a:rPr sz="1400" b="0">
+              <a:rPr sz="1250" b="0">
                 <a:solidFill>
                   <a:srgbClr val="1F2A3A"/>
                 </a:solidFill>
@@ -36102,7 +36239,7 @@
       </p:sp>
       <p:pic>
         <p:nvPicPr>
-          <p:cNvPr id="6" name="삽화:설비_유압파워팩.svg" descr="illust_406107587883909973_1793113376.png"/>
+          <p:cNvPr id="6" name="삽화:설비_유압파워팩.svg" descr="illust_7290067358994019389_1793113376.png"/>
           <p:cNvPicPr>
             <a:picLocks noChangeAspect="1"/>
           </p:cNvPicPr>
@@ -36802,7 +36939,7 @@
       </p:sp>
       <p:pic>
         <p:nvPicPr>
-          <p:cNvPr id="6" name="삽화:데이터_명령_두경로.svg" descr="illust_383317539689283505_1793113376.png"/>
+          <p:cNvPr id="6" name="삽화:데이터_명령_두경로.svg" descr="illust_2543659925898596390_1793113376.png"/>
           <p:cNvPicPr>
             <a:picLocks noChangeAspect="1"/>
           </p:cNvPicPr>
